--- a/attached_assets/VaughnMartin-Investor-Deck-v12.pptx
+++ b/attached_assets/VaughnMartin-Investor-Deck-v12.pptx
@@ -12343,30 +12343,6 @@
           <a:chExt cx="0" cy="0"/>
         </a:xfrm>
       </p:grpSpPr>
-      <p:pic>
-        <p:nvPicPr>
-          <p:cNvPr id="18" name="Picture 17" descr="deck_how_it_executes.jpg"/>
-          <p:cNvPicPr>
-            <a:picLocks noChangeAspect="1"/>
-          </p:cNvPicPr>
-          <p:nvPr/>
-        </p:nvPicPr>
-        <p:blipFill>
-          <a:blip r:embed="rId4"/>
-          <a:stretch>
-            <a:fillRect/>
-          </a:stretch>
-        </p:blipFill>
-        <p:spPr>
-          <a:xfrm>
-            <a:off x="5943600" y="1097280"/>
-            <a:ext cx="5852160" cy="5303520"/>
-          </a:xfrm>
-          <a:prstGeom prst="rect">
-            <a:avLst/>
-          </a:prstGeom>
-        </p:spPr>
-      </p:pic>
       <p:sp>
         <p:nvSpPr>
           <p:cNvPr id="2" name="Rectangle 1"/>
@@ -14913,30 +14889,6 @@
           <a:chExt cx="0" cy="0"/>
         </a:xfrm>
       </p:grpSpPr>
-      <p:pic>
-        <p:nvPicPr>
-          <p:cNvPr id="31" name="Picture 30" descr="deck_proof_story.jpg"/>
-          <p:cNvPicPr>
-            <a:picLocks noChangeAspect="1"/>
-          </p:cNvPicPr>
-          <p:nvPr/>
-        </p:nvPicPr>
-        <p:blipFill>
-          <a:blip r:embed="rId4"/>
-          <a:stretch>
-            <a:fillRect/>
-          </a:stretch>
-        </p:blipFill>
-        <p:spPr>
-          <a:xfrm>
-            <a:off x="5943600" y="914400"/>
-            <a:ext cx="5852160" cy="5486400"/>
-          </a:xfrm>
-          <a:prstGeom prst="rect">
-            <a:avLst/>
-          </a:prstGeom>
-        </p:spPr>
-      </p:pic>
       <p:sp>
         <p:nvSpPr>
           <p:cNvPr id="2" name="Rectangle 1"/>
@@ -16048,30 +16000,6 @@
           <a:chExt cx="0" cy="0"/>
         </a:xfrm>
       </p:grpSpPr>
-      <p:pic>
-        <p:nvPicPr>
-          <p:cNvPr id="49" name="Picture 48" descr="deck_roi_calculator.jpg"/>
-          <p:cNvPicPr>
-            <a:picLocks noChangeAspect="1"/>
-          </p:cNvPicPr>
-          <p:nvPr/>
-        </p:nvPicPr>
-        <p:blipFill>
-          <a:blip r:embed="rId3"/>
-          <a:stretch>
-            <a:fillRect/>
-          </a:stretch>
-        </p:blipFill>
-        <p:spPr>
-          <a:xfrm>
-            <a:off x="5760720" y="914400"/>
-            <a:ext cx="6035040" cy="5486400"/>
-          </a:xfrm>
-          <a:prstGeom prst="rect">
-            <a:avLst/>
-          </a:prstGeom>
-        </p:spPr>
-      </p:pic>
       <p:sp>
         <p:nvSpPr>
           <p:cNvPr id="2" name="Rectangle 1"/>
@@ -17876,8 +17804,8 @@
         </p:blipFill>
         <p:spPr>
           <a:xfrm>
-            <a:off x="137160" y="2560320"/>
-            <a:ext cx="11887200" cy="4023360"/>
+            <a:off x="128016" y="2633472"/>
+            <a:ext cx="11942064" cy="3163824"/>
           </a:xfrm>
           <a:prstGeom prst="rect">
             <a:avLst/>
